--- a/회의록/충돌검사.pptx
+++ b/회의록/충돌검사.pptx
@@ -7,6 +7,7 @@
   <p:sldIdLst>
     <p:sldId id="256" r:id="rId2"/>
     <p:sldId id="257" r:id="rId3"/>
+    <p:sldId id="258" r:id="rId4"/>
   </p:sldIdLst>
   <p:sldSz cx="12192000" cy="6858000"/>
   <p:notesSz cx="6858000" cy="9144000"/>
@@ -105,6 +106,11 @@
       </a:defRPr>
     </a:lvl9pPr>
   </p:defaultTextStyle>
+  <p:extLst>
+    <p:ext uri="{EFAFB233-063F-42B5-8137-9DF3F51BA10A}">
+      <p15:sldGuideLst xmlns:p15="http://schemas.microsoft.com/office/powerpoint/2012/main"/>
+    </p:ext>
+  </p:extLst>
 </p:presentation>
 </file>
 
@@ -255,7 +261,7 @@
           <a:p>
             <a:fld id="{BA603740-17C1-4DC7-9DE7-BD0A1F545CF2}" type="datetimeFigureOut">
               <a:rPr lang="ko-KR" altLang="en-US" smtClean="0"/>
-              <a:t>2025-06-30</a:t>
+              <a:t>2026-02-23</a:t>
             </a:fld>
             <a:endParaRPr lang="ko-KR" altLang="en-US"/>
           </a:p>
@@ -453,7 +459,7 @@
           <a:p>
             <a:fld id="{BA603740-17C1-4DC7-9DE7-BD0A1F545CF2}" type="datetimeFigureOut">
               <a:rPr lang="ko-KR" altLang="en-US" smtClean="0"/>
-              <a:t>2025-06-30</a:t>
+              <a:t>2026-02-23</a:t>
             </a:fld>
             <a:endParaRPr lang="ko-KR" altLang="en-US"/>
           </a:p>
@@ -661,7 +667,7 @@
           <a:p>
             <a:fld id="{BA603740-17C1-4DC7-9DE7-BD0A1F545CF2}" type="datetimeFigureOut">
               <a:rPr lang="ko-KR" altLang="en-US" smtClean="0"/>
-              <a:t>2025-06-30</a:t>
+              <a:t>2026-02-23</a:t>
             </a:fld>
             <a:endParaRPr lang="ko-KR" altLang="en-US"/>
           </a:p>
@@ -859,7 +865,7 @@
           <a:p>
             <a:fld id="{BA603740-17C1-4DC7-9DE7-BD0A1F545CF2}" type="datetimeFigureOut">
               <a:rPr lang="ko-KR" altLang="en-US" smtClean="0"/>
-              <a:t>2025-06-30</a:t>
+              <a:t>2026-02-23</a:t>
             </a:fld>
             <a:endParaRPr lang="ko-KR" altLang="en-US"/>
           </a:p>
@@ -1134,7 +1140,7 @@
           <a:p>
             <a:fld id="{BA603740-17C1-4DC7-9DE7-BD0A1F545CF2}" type="datetimeFigureOut">
               <a:rPr lang="ko-KR" altLang="en-US" smtClean="0"/>
-              <a:t>2025-06-30</a:t>
+              <a:t>2026-02-23</a:t>
             </a:fld>
             <a:endParaRPr lang="ko-KR" altLang="en-US"/>
           </a:p>
@@ -1399,7 +1405,7 @@
           <a:p>
             <a:fld id="{BA603740-17C1-4DC7-9DE7-BD0A1F545CF2}" type="datetimeFigureOut">
               <a:rPr lang="ko-KR" altLang="en-US" smtClean="0"/>
-              <a:t>2025-06-30</a:t>
+              <a:t>2026-02-23</a:t>
             </a:fld>
             <a:endParaRPr lang="ko-KR" altLang="en-US"/>
           </a:p>
@@ -1811,7 +1817,7 @@
           <a:p>
             <a:fld id="{BA603740-17C1-4DC7-9DE7-BD0A1F545CF2}" type="datetimeFigureOut">
               <a:rPr lang="ko-KR" altLang="en-US" smtClean="0"/>
-              <a:t>2025-06-30</a:t>
+              <a:t>2026-02-23</a:t>
             </a:fld>
             <a:endParaRPr lang="ko-KR" altLang="en-US"/>
           </a:p>
@@ -1952,7 +1958,7 @@
           <a:p>
             <a:fld id="{BA603740-17C1-4DC7-9DE7-BD0A1F545CF2}" type="datetimeFigureOut">
               <a:rPr lang="ko-KR" altLang="en-US" smtClean="0"/>
-              <a:t>2025-06-30</a:t>
+              <a:t>2026-02-23</a:t>
             </a:fld>
             <a:endParaRPr lang="ko-KR" altLang="en-US"/>
           </a:p>
@@ -2065,7 +2071,7 @@
           <a:p>
             <a:fld id="{BA603740-17C1-4DC7-9DE7-BD0A1F545CF2}" type="datetimeFigureOut">
               <a:rPr lang="ko-KR" altLang="en-US" smtClean="0"/>
-              <a:t>2025-06-30</a:t>
+              <a:t>2026-02-23</a:t>
             </a:fld>
             <a:endParaRPr lang="ko-KR" altLang="en-US"/>
           </a:p>
@@ -2376,7 +2382,7 @@
           <a:p>
             <a:fld id="{BA603740-17C1-4DC7-9DE7-BD0A1F545CF2}" type="datetimeFigureOut">
               <a:rPr lang="ko-KR" altLang="en-US" smtClean="0"/>
-              <a:t>2025-06-30</a:t>
+              <a:t>2026-02-23</a:t>
             </a:fld>
             <a:endParaRPr lang="ko-KR" altLang="en-US"/>
           </a:p>
@@ -2664,7 +2670,7 @@
           <a:p>
             <a:fld id="{BA603740-17C1-4DC7-9DE7-BD0A1F545CF2}" type="datetimeFigureOut">
               <a:rPr lang="ko-KR" altLang="en-US" smtClean="0"/>
-              <a:t>2025-06-30</a:t>
+              <a:t>2026-02-23</a:t>
             </a:fld>
             <a:endParaRPr lang="ko-KR" altLang="en-US"/>
           </a:p>
@@ -2905,7 +2911,7 @@
           <a:p>
             <a:fld id="{BA603740-17C1-4DC7-9DE7-BD0A1F545CF2}" type="datetimeFigureOut">
               <a:rPr lang="ko-KR" altLang="en-US" smtClean="0"/>
-              <a:t>2025-06-30</a:t>
+              <a:t>2026-02-23</a:t>
             </a:fld>
             <a:endParaRPr lang="ko-KR" altLang="en-US"/>
           </a:p>
@@ -4386,6 +4392,407 @@
     <p:extLst>
       <p:ext uri="{BB962C8B-B14F-4D97-AF65-F5344CB8AC3E}">
         <p14:creationId xmlns:p14="http://schemas.microsoft.com/office/powerpoint/2010/main" val="4133213452"/>
+      </p:ext>
+    </p:extLst>
+  </p:cSld>
+  <p:clrMapOvr>
+    <a:masterClrMapping/>
+  </p:clrMapOvr>
+</p:sld>
+</file>
+
+<file path=ppt/slides/slide3.xml><?xml version="1.0" encoding="utf-8"?>
+<p:sld xmlns:a="http://schemas.openxmlformats.org/drawingml/2006/main" xmlns:r="http://schemas.openxmlformats.org/officeDocument/2006/relationships" xmlns:p="http://schemas.openxmlformats.org/presentationml/2006/main">
+  <p:cSld>
+    <p:spTree>
+      <p:nvGrpSpPr>
+        <p:cNvPr id="1" name="">
+          <a:extLst>
+            <a:ext uri="{FF2B5EF4-FFF2-40B4-BE49-F238E27FC236}">
+              <a16:creationId xmlns:a16="http://schemas.microsoft.com/office/drawing/2014/main" id="{CCB5A56A-6B41-0B18-4725-9B1C87D933AE}"/>
+            </a:ext>
+          </a:extLst>
+        </p:cNvPr>
+        <p:cNvGrpSpPr/>
+        <p:nvPr/>
+      </p:nvGrpSpPr>
+      <p:grpSpPr>
+        <a:xfrm>
+          <a:off x="0" y="0"/>
+          <a:ext cx="0" cy="0"/>
+          <a:chOff x="0" y="0"/>
+          <a:chExt cx="0" cy="0"/>
+        </a:xfrm>
+      </p:grpSpPr>
+      <p:sp>
+        <p:nvSpPr>
+          <p:cNvPr id="2" name="제목 1">
+            <a:extLst>
+              <a:ext uri="{FF2B5EF4-FFF2-40B4-BE49-F238E27FC236}">
+                <a16:creationId xmlns:a16="http://schemas.microsoft.com/office/drawing/2014/main" id="{F767F435-DDA2-EC83-2BD3-071E555B795E}"/>
+              </a:ext>
+            </a:extLst>
+          </p:cNvPr>
+          <p:cNvSpPr>
+            <a:spLocks noGrp="1"/>
+          </p:cNvSpPr>
+          <p:nvPr>
+            <p:ph type="title"/>
+          </p:nvPr>
+        </p:nvSpPr>
+        <p:spPr>
+          <a:xfrm>
+            <a:off x="838200" y="365125"/>
+            <a:ext cx="10515600" cy="1325563"/>
+          </a:xfrm>
+        </p:spPr>
+        <p:txBody>
+          <a:bodyPr/>
+          <a:lstStyle/>
+          <a:p>
+            <a:r>
+              <a:rPr lang="ko-KR" altLang="en-US" dirty="0"/>
+              <a:t>충돌검사</a:t>
+            </a:r>
+          </a:p>
+        </p:txBody>
+      </p:sp>
+      <p:sp>
+        <p:nvSpPr>
+          <p:cNvPr id="8" name="내용 개체 틀 7">
+            <a:extLst>
+              <a:ext uri="{FF2B5EF4-FFF2-40B4-BE49-F238E27FC236}">
+                <a16:creationId xmlns:a16="http://schemas.microsoft.com/office/drawing/2014/main" id="{9B978E8E-5123-5C27-F522-750EEA6F913B}"/>
+              </a:ext>
+            </a:extLst>
+          </p:cNvPr>
+          <p:cNvSpPr>
+            <a:spLocks noGrp="1"/>
+          </p:cNvSpPr>
+          <p:nvPr>
+            <p:ph idx="1"/>
+          </p:nvPr>
+        </p:nvSpPr>
+        <p:spPr/>
+        <p:txBody>
+          <a:bodyPr>
+            <a:normAutofit fontScale="92500" lnSpcReduction="10000"/>
+          </a:bodyPr>
+          <a:lstStyle/>
+          <a:p>
+            <a:r>
+              <a:rPr lang="en-US" altLang="ko-KR" dirty="0" err="1"/>
+              <a:t>CanGo</a:t>
+            </a:r>
+            <a:r>
+              <a:rPr lang="en-US" altLang="ko-KR" dirty="0"/>
+              <a:t>(</a:t>
+            </a:r>
+            <a:r>
+              <a:rPr lang="en-US" altLang="ko-KR" dirty="0" err="1"/>
+              <a:t>Bounding_Box</a:t>
+            </a:r>
+            <a:r>
+              <a:rPr lang="en-US" altLang="ko-KR" dirty="0"/>
+              <a:t> b)</a:t>
+            </a:r>
+          </a:p>
+          <a:p>
+            <a:pPr lvl="1"/>
+            <a:r>
+              <a:rPr lang="en-US" altLang="ko-KR" dirty="0" err="1"/>
+              <a:t>Curr_cube</a:t>
+            </a:r>
+            <a:r>
+              <a:rPr lang="en-US" altLang="ko-KR" dirty="0"/>
+              <a:t> = </a:t>
+            </a:r>
+            <a:r>
+              <a:rPr lang="en-US" altLang="ko-KR" dirty="0" err="1"/>
+              <a:t>Get_curr_cube</a:t>
+            </a:r>
+            <a:r>
+              <a:rPr lang="en-US" altLang="ko-KR" dirty="0"/>
+              <a:t>(b);</a:t>
+            </a:r>
+          </a:p>
+          <a:p>
+            <a:pPr lvl="1"/>
+            <a:r>
+              <a:rPr lang="en-US" altLang="ko-KR" dirty="0" err="1"/>
+              <a:t>Cube_type</a:t>
+            </a:r>
+            <a:r>
+              <a:rPr lang="en-US" altLang="ko-KR" dirty="0"/>
+              <a:t> = </a:t>
+            </a:r>
+            <a:r>
+              <a:rPr lang="en-US" altLang="ko-KR" dirty="0" err="1"/>
+              <a:t>Get_Cube_Type</a:t>
+            </a:r>
+            <a:r>
+              <a:rPr lang="en-US" altLang="ko-KR" dirty="0"/>
+              <a:t>(</a:t>
+            </a:r>
+            <a:r>
+              <a:rPr lang="en-US" altLang="ko-KR" dirty="0" err="1"/>
+              <a:t>Curr_cube</a:t>
+            </a:r>
+            <a:r>
+              <a:rPr lang="en-US" altLang="ko-KR" dirty="0"/>
+              <a:t>);</a:t>
+            </a:r>
+          </a:p>
+          <a:p>
+            <a:pPr lvl="1"/>
+            <a:r>
+              <a:rPr lang="en-US" altLang="ko-KR" dirty="0" err="1"/>
+              <a:t>Cube_Location</a:t>
+            </a:r>
+            <a:r>
+              <a:rPr lang="en-US" altLang="ko-KR" dirty="0"/>
+              <a:t> = </a:t>
+            </a:r>
+            <a:r>
+              <a:rPr lang="en-US" altLang="ko-KR" dirty="0" err="1"/>
+              <a:t>Get_Location</a:t>
+            </a:r>
+            <a:r>
+              <a:rPr lang="en-US" altLang="ko-KR" dirty="0"/>
+              <a:t>(</a:t>
+            </a:r>
+            <a:r>
+              <a:rPr lang="en-US" altLang="ko-KR" dirty="0" err="1"/>
+              <a:t>Curr_cube</a:t>
+            </a:r>
+            <a:r>
+              <a:rPr lang="en-US" altLang="ko-KR" dirty="0"/>
+              <a:t>);</a:t>
+            </a:r>
+          </a:p>
+          <a:p>
+            <a:pPr lvl="1"/>
+            <a:r>
+              <a:rPr lang="en-US" altLang="ko-KR" dirty="0" err="1"/>
+              <a:t>CanGo</a:t>
+            </a:r>
+            <a:r>
+              <a:rPr lang="en-US" altLang="ko-KR" dirty="0"/>
+              <a:t>(</a:t>
+            </a:r>
+            <a:r>
+              <a:rPr lang="en-US" altLang="ko-KR" dirty="0" err="1"/>
+              <a:t>Cube_Type</a:t>
+            </a:r>
+            <a:r>
+              <a:rPr lang="en-US" altLang="ko-KR" dirty="0"/>
+              <a:t>, </a:t>
+            </a:r>
+            <a:r>
+              <a:rPr lang="en-US" altLang="ko-KR" dirty="0" err="1"/>
+              <a:t>Cube_Location</a:t>
+            </a:r>
+            <a:r>
+              <a:rPr lang="en-US" altLang="ko-KR" dirty="0"/>
+              <a:t>, b) &amp;&amp; </a:t>
+            </a:r>
+            <a:r>
+              <a:rPr lang="en-US" altLang="ko-KR" dirty="0" err="1"/>
+              <a:t>CanGo_Furniture</a:t>
+            </a:r>
+            <a:r>
+              <a:rPr lang="en-US" altLang="ko-KR" dirty="0"/>
+              <a:t>(</a:t>
+            </a:r>
+            <a:r>
+              <a:rPr lang="en-US" altLang="ko-KR" dirty="0" err="1"/>
+              <a:t>furnitures</a:t>
+            </a:r>
+            <a:r>
+              <a:rPr lang="en-US" altLang="ko-KR" dirty="0"/>
+              <a:t>[</a:t>
+            </a:r>
+            <a:r>
+              <a:rPr lang="en-US" altLang="ko-KR" dirty="0" err="1"/>
+              <a:t>Curr_cube</a:t>
+            </a:r>
+            <a:r>
+              <a:rPr lang="en-US" altLang="ko-KR" dirty="0"/>
+              <a:t>], b);</a:t>
+            </a:r>
+          </a:p>
+          <a:p>
+            <a:r>
+              <a:rPr lang="en-US" altLang="ko-KR" dirty="0" err="1"/>
+              <a:t>CanGo</a:t>
+            </a:r>
+            <a:r>
+              <a:rPr lang="en-US" altLang="ko-KR" dirty="0"/>
+              <a:t>(</a:t>
+            </a:r>
+            <a:r>
+              <a:rPr lang="en-US" altLang="ko-KR" dirty="0" err="1"/>
+              <a:t>Cube_Type</a:t>
+            </a:r>
+            <a:r>
+              <a:rPr lang="en-US" altLang="ko-KR" dirty="0"/>
+              <a:t>, </a:t>
+            </a:r>
+            <a:r>
+              <a:rPr lang="en-US" altLang="ko-KR" dirty="0" err="1"/>
+              <a:t>Cube_Location</a:t>
+            </a:r>
+            <a:r>
+              <a:rPr lang="en-US" altLang="ko-KR" dirty="0"/>
+              <a:t>, b);</a:t>
+            </a:r>
+          </a:p>
+          <a:p>
+            <a:pPr lvl="1"/>
+            <a:r>
+              <a:rPr lang="en-US" altLang="ko-KR" dirty="0"/>
+              <a:t>For (pixel : b) // </a:t>
+            </a:r>
+            <a:r>
+              <a:rPr lang="ko-KR" altLang="en-US" dirty="0"/>
+              <a:t>부하가 크니까 여기서 최적화가 필요다</a:t>
+            </a:r>
+            <a:r>
+              <a:rPr lang="en-US" altLang="ko-KR"/>
+              <a:t>.</a:t>
+            </a:r>
+            <a:endParaRPr lang="en-US" altLang="ko-KR" dirty="0"/>
+          </a:p>
+          <a:p>
+            <a:pPr lvl="2"/>
+            <a:r>
+              <a:rPr lang="en-US" altLang="ko-KR" dirty="0" err="1"/>
+              <a:t>IsCollide</a:t>
+            </a:r>
+            <a:r>
+              <a:rPr lang="en-US" altLang="ko-KR" dirty="0"/>
+              <a:t> (</a:t>
+            </a:r>
+            <a:r>
+              <a:rPr lang="en-US" altLang="ko-KR" dirty="0" err="1"/>
+              <a:t>Cube_Type</a:t>
+            </a:r>
+            <a:r>
+              <a:rPr lang="en-US" altLang="ko-KR" dirty="0"/>
+              <a:t>, </a:t>
+            </a:r>
+            <a:r>
+              <a:rPr lang="en-US" altLang="ko-KR" dirty="0" err="1"/>
+              <a:t>Cube_Location</a:t>
+            </a:r>
+            <a:r>
+              <a:rPr lang="en-US" altLang="ko-KR" dirty="0"/>
+              <a:t>, pixel)</a:t>
+            </a:r>
+          </a:p>
+          <a:p>
+            <a:r>
+              <a:rPr lang="en-US" altLang="ko-KR" dirty="0" err="1"/>
+              <a:t>IsCollide</a:t>
+            </a:r>
+            <a:r>
+              <a:rPr lang="en-US" altLang="ko-KR" dirty="0"/>
+              <a:t>(</a:t>
+            </a:r>
+            <a:r>
+              <a:rPr lang="en-US" altLang="ko-KR" dirty="0" err="1"/>
+              <a:t>Cube_Type</a:t>
+            </a:r>
+            <a:r>
+              <a:rPr lang="en-US" altLang="ko-KR" dirty="0"/>
+              <a:t>, </a:t>
+            </a:r>
+            <a:r>
+              <a:rPr lang="en-US" altLang="ko-KR" dirty="0" err="1"/>
+              <a:t>Cube_Location</a:t>
+            </a:r>
+            <a:r>
+              <a:rPr lang="en-US" altLang="ko-KR" dirty="0"/>
+              <a:t>, Pixel)</a:t>
+            </a:r>
+          </a:p>
+          <a:p>
+            <a:pPr lvl="1"/>
+            <a:r>
+              <a:rPr lang="en-US" altLang="ko-KR" dirty="0"/>
+              <a:t>return </a:t>
+            </a:r>
+            <a:r>
+              <a:rPr lang="en-US" altLang="ko-KR" dirty="0" err="1"/>
+              <a:t>collide_map</a:t>
+            </a:r>
+            <a:r>
+              <a:rPr lang="en-US" altLang="ko-KR" dirty="0"/>
+              <a:t>[</a:t>
+            </a:r>
+            <a:r>
+              <a:rPr lang="en-US" altLang="ko-KR" dirty="0" err="1"/>
+              <a:t>Cube_Type</a:t>
+            </a:r>
+            <a:r>
+              <a:rPr lang="en-US" altLang="ko-KR" dirty="0"/>
+              <a:t>][</a:t>
+            </a:r>
+            <a:r>
+              <a:rPr lang="en-US" altLang="ko-KR" dirty="0" err="1"/>
+              <a:t>Pixel.x</a:t>
+            </a:r>
+            <a:r>
+              <a:rPr lang="en-US" altLang="ko-KR" dirty="0"/>
+              <a:t> + </a:t>
+            </a:r>
+            <a:r>
+              <a:rPr lang="en-US" altLang="ko-KR" dirty="0" err="1"/>
+              <a:t>Cube_Location.x</a:t>
+            </a:r>
+            <a:r>
+              <a:rPr lang="en-US" altLang="ko-KR" dirty="0"/>
+              <a:t>][</a:t>
+            </a:r>
+            <a:r>
+              <a:rPr lang="en-US" altLang="ko-KR" dirty="0" err="1"/>
+              <a:t>Pixel.y</a:t>
+            </a:r>
+            <a:r>
+              <a:rPr lang="en-US" altLang="ko-KR" dirty="0"/>
+              <a:t>+ </a:t>
+            </a:r>
+            <a:r>
+              <a:rPr lang="en-US" altLang="ko-KR" dirty="0" err="1"/>
+              <a:t>Cube_location.y</a:t>
+            </a:r>
+            <a:r>
+              <a:rPr lang="en-US" altLang="ko-KR" dirty="0"/>
+              <a:t>][</a:t>
+            </a:r>
+            <a:r>
+              <a:rPr lang="en-US" altLang="ko-KR" dirty="0" err="1"/>
+              <a:t>Pixel.z</a:t>
+            </a:r>
+            <a:r>
+              <a:rPr lang="en-US" altLang="ko-KR" dirty="0"/>
+              <a:t>+ </a:t>
+            </a:r>
+            <a:r>
+              <a:rPr lang="en-US" altLang="ko-KR" dirty="0" err="1"/>
+              <a:t>Cube_Location.z</a:t>
+            </a:r>
+            <a:r>
+              <a:rPr lang="en-US" altLang="ko-KR" dirty="0"/>
+              <a:t>];</a:t>
+            </a:r>
+          </a:p>
+        </p:txBody>
+      </p:sp>
+    </p:spTree>
+    <p:extLst>
+      <p:ext uri="{BB962C8B-B14F-4D97-AF65-F5344CB8AC3E}">
+        <p14:creationId xmlns:p14="http://schemas.microsoft.com/office/powerpoint/2010/main" val="2423099585"/>
       </p:ext>
     </p:extLst>
   </p:cSld>
